--- a/docs/posts/fpl-teaching-learning-ai/index.pptx
+++ b/docs/posts/fpl-teaching-learning-ai/index.pptx
@@ -3167,7 +3167,7 @@
             <a:br/>
             <a:r>
               <a:rPr/>
-              <a:t>Colin Madland</a:t>
+              <a:t>Colin Madland, Derrick Mohamed</a:t>
             </a:r>
           </a:p>
         </p:txBody>

--- a/docs/posts/fpl-teaching-learning-ai/index.pptx
+++ b/docs/posts/fpl-teaching-learning-ai/index.pptx
@@ -3286,8 +3286,8 @@
         </p:blipFill>
         <p:spPr bwMode="auto">
           <a:xfrm>
-            <a:off x="3568700" y="685800"/>
-            <a:ext cx="5105400" cy="3429000"/>
+            <a:off x="3568700" y="368300"/>
+            <a:ext cx="5105400" cy="4064000"/>
           </a:xfrm>
           <a:prstGeom prst="rect">
             <a:avLst/>
@@ -4377,7 +4377,7 @@
               <a:rPr>
                 <a:hlinkClick r:id="rId2"/>
               </a:rPr>
-              <a:t>https://doi.org/gfkfk6</a:t>
+              <a:t>https://doi.org/10/gfkfk6</a:t>
             </a:r>
           </a:p>
           <a:p>

--- a/docs/posts/fpl-teaching-learning-ai/index.pptx
+++ b/docs/posts/fpl-teaching-learning-ai/index.pptx
@@ -3163,8 +3163,6 @@
             <a:pPr lvl="0" indent="0" marL="0">
               <a:buNone/>
             </a:pPr>
-            <a:br/>
-            <a:br/>
             <a:r>
               <a:rPr/>
               <a:t>Colin Madland, Derrick Mohamed</a:t>
